--- a/curso_es/pptx/S11.pptx
+++ b/curso_es/pptx/S11.pptx
@@ -3801,7 +3801,7 @@
                 </a:solidFill>
                 <a:latin typeface="Nunito Sans"/>
               </a:rPr>
-              <a:t>Aitor: «Nadie de mi clase lee libros por gusto». Maialen: «Yo he leído tres este verano, y nadie me obligó».</a:t>
+              <a:t>Un chico: «Nadie de mi clase lee libros por gusto». Una chica: «Yo he leído tres este verano, y nadie me obligó».</a:t>
             </a:r>
           </a:p>
         </p:txBody>
@@ -3849,7 +3849,7 @@
                 </a:solidFill>
                 <a:latin typeface="Nunito Sans"/>
               </a:rPr>
-              <a:t>La frase de Aitor es general: «nadie».</a:t>
+              <a:t>La frase del chico es general: «nadie».</a:t>
             </a:r>
           </a:p>
           <a:p>
@@ -3874,7 +3874,7 @@
                 </a:solidFill>
                 <a:latin typeface="Nunito Sans"/>
               </a:rPr>
-              <a:t>Maialen es un caso en contra: un </a:t>
+              <a:t>La chica es un caso en contra: un </a:t>
             </a:r>
             <a:r>
               <a:rPr sz="2400" b="1">
@@ -3942,7 +3942,7 @@
                 </a:solidFill>
                 <a:latin typeface="Nunito Sans"/>
               </a:rPr>
-              <a:t>Conclusión: la frase de Aitor es falsa. Podría decir «pocos», pero no «nadie».</a:t>
+              <a:t>Conclusión: la frase del chico es falsa. Podría decir «pocos», pero no «nadie».</a:t>
             </a:r>
           </a:p>
         </p:txBody>
@@ -4128,7 +4128,7 @@
                 </a:solidFill>
                 <a:latin typeface="Nunito Sans"/>
               </a:rPr>
-              <a:t>Kevin: «Todos los youtubers son ricos: mira estos cinco, que tienen casas enormes».</a:t>
+              <a:t>Un chico: «Todos los youtubers son ricos: mira estos cinco, que tienen casas enormes».</a:t>
             </a:r>
           </a:p>
         </p:txBody>
@@ -4176,7 +4176,7 @@
                 </a:solidFill>
                 <a:latin typeface="Nunito Sans"/>
               </a:rPr>
-              <a:t>Kevin da cinco </a:t>
+              <a:t>Ese chico da cinco </a:t>
             </a:r>
             <a:r>
               <a:rPr sz="2400" b="1">
@@ -5188,7 +5188,7 @@
                 </a:solidFill>
                 <a:latin typeface="Nunito Sans"/>
               </a:rPr>
-              <a:t>Leire: «A los perros les encanta salir a pasear». Kevin: «El mío odia pasear: se esconde debajo de la cama».</a:t>
+              <a:t>Una chica: «A los perros les encanta salir a pasear». Un chico: «El mío odia pasear: se esconde debajo de la cama».</a:t>
             </a:r>
           </a:p>
         </p:txBody>
@@ -5236,7 +5236,7 @@
                 </a:solidFill>
                 <a:latin typeface="Nunito Sans"/>
               </a:rPr>
-              <a:t>Kevin tiene un contraejemplo. ¿La frase de Leire es falsa?</a:t>
+              <a:t>El chico tiene un contraejemplo. ¿La frase de la chica es falsa?</a:t>
             </a:r>
           </a:p>
           <a:p>
@@ -5261,7 +5261,7 @@
                 </a:solidFill>
                 <a:latin typeface="Nunito Sans"/>
               </a:rPr>
-              <a:t>Leire no dice «todos los perros»: dice cómo </a:t>
+              <a:t>La chica no dice «todos los perros»: dice cómo </a:t>
             </a:r>
             <a:r>
               <a:rPr sz="2400" b="1">
@@ -6914,7 +6914,7 @@
                 </a:solidFill>
                 <a:latin typeface="Nunito Sans"/>
               </a:rPr>
-              <a:t>Omar dice: «Todos los gatos odian el agua». Leire le enseña un vídeo de su gato nadando tan tranquilo.</a:t>
+              <a:t>Un chico dice: «Todos los gatos odian el agua». Una chica le enseña un vídeo de su gato nadando tan tranquilo.</a:t>
             </a:r>
           </a:p>
         </p:txBody>
@@ -6953,7 +6953,7 @@
                 </a:solidFill>
                 <a:latin typeface="Nunito Sans"/>
               </a:rPr>
-              <a:t>¿Qué le pasa a la frase de Omar?</a:t>
+              <a:t>¿Qué le pasa a la frase de ese chico?</a:t>
             </a:r>
           </a:p>
         </p:txBody>
